--- a/docs/WG立ち上げガイド/03_開発の進め方.pptx
+++ b/docs/WG立ち上げガイド/03_開発の進め方.pptx
@@ -12260,7 +12260,7 @@
                           <a:ea typeface="Meiryo" pitchFamily="34" charset="-122"/>
                           <a:cs typeface="Meiryo" pitchFamily="34" charset="-120"/>
                         </a:rPr>
-                        <a:t>招待を受けたか、書き込み権限があるか運営に確かめる</a:t>
+                        <a:t>org の招待を受けたか、WG のチームに入っているか運営に確かめる</a:t>
                       </a:r>
                       <a:endParaRPr lang="en-US" sz="1050" dirty="0">
                         <a:latin typeface="Meiryo" charset="0"/>

--- a/docs/WG立ち上げガイド/03_開発の進め方.pptx
+++ b/docs/WG立ち上げガイド/03_開発の進め方.pptx
@@ -12260,7 +12260,7 @@
                           <a:ea typeface="Meiryo" pitchFamily="34" charset="-122"/>
                           <a:cs typeface="Meiryo" pitchFamily="34" charset="-120"/>
                         </a:rPr>
-                        <a:t>org の招待を受けたか、WG のチームに入っているか運営に確かめる</a:t>
+                        <a:t>「WG に参加」を済ませ、招待の Join を押したか確かめる</a:t>
                       </a:r>
                       <a:endParaRPr lang="en-US" sz="1050" dirty="0">
                         <a:latin typeface="Meiryo" charset="0"/>

--- a/docs/WG立ち上げガイド/03_開発の進め方.pptx
+++ b/docs/WG立ち上げガイド/03_開発の進め方.pptx
@@ -774,7 +774,7 @@
           <a:p>
             <a:r>
               <a:rPr lang="en-US" dirty="0"/>
-              <a:t>main には直接送れないようにルールで止めてあります。必ず自分のブランチを作ってから作業します。コミットは区切りのいいところで何回してもかまいません。初めて送るときは GitHub へのサインインを求められるので、許可してブラウザで Authorize を押します。</a:t>
+              <a:t>main のままコミットしようとすると、VS Code がブランチを作るように促します。main への push も手元で止めてあります。必ず自分のブランチを作ってから作業します。コミットは区切りのいいところで何回してもかまいません。初めて送るときは GitHub へのサインインを求められるので、許可してブラウザで Authorize を押します。</a:t>
             </a:r>
             <a:endParaRPr lang="en-US" dirty="0"/>
           </a:p>
@@ -862,7 +862,7 @@
           <a:p>
             <a:r>
               <a:rPr lang="en-US" dirty="0"/>
-              <a:t>ブラウザで GitHub のリポジトリを開くと、送ったブランチについて Compare &amp; pull request の帯が出ます。テストが赤いまま、または承認がないとマージできません。</a:t>
+              <a:t>ブラウザで GitHub のリポジトリを開くと、送ったブランチについて Compare &amp; pull request の帯が出ます。テストが赤いまま、または承認がないうちは、マージしないでください。非公開のリポジトリなので仕組みでは止まりません。WG の決まりとして守ります。</a:t>
             </a:r>
             <a:endParaRPr lang="en-US" dirty="0"/>
           </a:p>
@@ -11640,7 +11640,7 @@
                           <a:ea typeface="Meiryo" pitchFamily="34" charset="-122"/>
                           <a:cs typeface="Meiryo" pitchFamily="34" charset="-120"/>
                         </a:rPr>
-                        <a:t>main に送ろうとして拒否された</a:t>
+                        <a:t>コミットでブランチ名を聞かれた</a:t>
                       </a:r>
                       <a:endParaRPr lang="en-US" sz="1050" dirty="0">
                         <a:latin typeface="Meiryo" charset="0"/>
@@ -11708,7 +11708,145 @@
                           <a:ea typeface="Meiryo" pitchFamily="34" charset="-122"/>
                           <a:cs typeface="Meiryo" pitchFamily="34" charset="-120"/>
                         </a:rPr>
-                        <a:t>ブランチを作ってから送る（main はルールで守っている）</a:t>
+                        <a:t>main のままだった。名前（例 add-login-page）を入れて進める</a:t>
+                      </a:r>
+                      <a:endParaRPr lang="en-US" sz="1050" dirty="0">
+                        <a:latin typeface="Meiryo" charset="0"/>
+                        <a:ea typeface="Meiryo" charset="0"/>
+                        <a:cs typeface="Meiryo" charset="0"/>
+                      </a:endParaRPr>
+                    </a:p>
+                  </a:txBody>
+                  <a:tcPr marL="7315200" marR="7315200" marT="0" marB="0" anchor="ctr">
+                    <a:lnL w="9525" cap="flat" cmpd="sng" algn="ctr">
+                      <a:solidFill>
+                        <a:srgbClr val="DDDDDD"/>
+                      </a:solidFill>
+                      <a:prstDash val="solid"/>
+                      <a:round/>
+                      <a:headEnd type="none" w="med" len="med"/>
+                      <a:tailEnd type="none" w="med" len="med"/>
+                    </a:lnL>
+                    <a:lnR w="9525" cap="flat" cmpd="sng" algn="ctr">
+                      <a:solidFill>
+                        <a:srgbClr val="DDDDDD"/>
+                      </a:solidFill>
+                      <a:prstDash val="solid"/>
+                      <a:round/>
+                      <a:headEnd type="none" w="med" len="med"/>
+                      <a:tailEnd type="none" w="med" len="med"/>
+                    </a:lnR>
+                    <a:lnT w="9525" cap="flat" cmpd="sng" algn="ctr">
+                      <a:solidFill>
+                        <a:srgbClr val="DDDDDD"/>
+                      </a:solidFill>
+                      <a:prstDash val="solid"/>
+                      <a:round/>
+                      <a:headEnd type="none" w="med" len="med"/>
+                      <a:tailEnd type="none" w="med" len="med"/>
+                    </a:lnT>
+                    <a:lnB w="9525" cap="flat" cmpd="sng" algn="ctr">
+                      <a:solidFill>
+                        <a:srgbClr val="DDDDDD"/>
+                      </a:solidFill>
+                      <a:prstDash val="solid"/>
+                      <a:round/>
+                      <a:headEnd type="none" w="med" len="med"/>
+                      <a:tailEnd type="none" w="med" len="med"/>
+                    </a:lnB>
+                    <a:solidFill>
+                      <a:srgbClr val="FFFFFF"/>
+                    </a:solidFill>
+                  </a:tcPr>
+                </a:tc>
+              </a:tr>
+              <a:tr h="365760">
+                <a:tc>
+                  <a:txBody>
+                    <a:bodyPr/>
+                    <a:lstStyle/>
+                    <a:p>
+                      <a:pPr indent="0" marL="0">
+                        <a:buNone/>
+                      </a:pPr>
+                      <a:r>
+                        <a:rPr lang="en-US" sz="1050" b="1" dirty="0">
+                          <a:solidFill>
+                            <a:srgbClr val="001E3C"/>
+                          </a:solidFill>
+                          <a:latin typeface="Meiryo" pitchFamily="34" charset="0"/>
+                          <a:ea typeface="Meiryo" pitchFamily="34" charset="-122"/>
+                          <a:cs typeface="Meiryo" pitchFamily="34" charset="-120"/>
+                        </a:rPr>
+                        <a:t>main に送ろうとして止められた</a:t>
+                      </a:r>
+                      <a:endParaRPr lang="en-US" sz="1050" dirty="0">
+                        <a:latin typeface="Meiryo" charset="0"/>
+                        <a:ea typeface="Meiryo" charset="0"/>
+                        <a:cs typeface="Meiryo" charset="0"/>
+                      </a:endParaRPr>
+                    </a:p>
+                  </a:txBody>
+                  <a:tcPr marL="7315200" marR="7315200" marT="0" marB="0" anchor="ctr">
+                    <a:lnL w="9525" cap="flat" cmpd="sng" algn="ctr">
+                      <a:solidFill>
+                        <a:srgbClr val="DDDDDD"/>
+                      </a:solidFill>
+                      <a:prstDash val="solid"/>
+                      <a:round/>
+                      <a:headEnd type="none" w="med" len="med"/>
+                      <a:tailEnd type="none" w="med" len="med"/>
+                    </a:lnL>
+                    <a:lnR w="9525" cap="flat" cmpd="sng" algn="ctr">
+                      <a:solidFill>
+                        <a:srgbClr val="DDDDDD"/>
+                      </a:solidFill>
+                      <a:prstDash val="solid"/>
+                      <a:round/>
+                      <a:headEnd type="none" w="med" len="med"/>
+                      <a:tailEnd type="none" w="med" len="med"/>
+                    </a:lnR>
+                    <a:lnT w="9525" cap="flat" cmpd="sng" algn="ctr">
+                      <a:solidFill>
+                        <a:srgbClr val="DDDDDD"/>
+                      </a:solidFill>
+                      <a:prstDash val="solid"/>
+                      <a:round/>
+                      <a:headEnd type="none" w="med" len="med"/>
+                      <a:tailEnd type="none" w="med" len="med"/>
+                    </a:lnT>
+                    <a:lnB w="9525" cap="flat" cmpd="sng" algn="ctr">
+                      <a:solidFill>
+                        <a:srgbClr val="DDDDDD"/>
+                      </a:solidFill>
+                      <a:prstDash val="solid"/>
+                      <a:round/>
+                      <a:headEnd type="none" w="med" len="med"/>
+                      <a:tailEnd type="none" w="med" len="med"/>
+                    </a:lnB>
+                    <a:solidFill>
+                      <a:srgbClr val="FFFFFF"/>
+                    </a:solidFill>
+                  </a:tcPr>
+                </a:tc>
+                <a:tc>
+                  <a:txBody>
+                    <a:bodyPr/>
+                    <a:lstStyle/>
+                    <a:p>
+                      <a:pPr indent="0" marL="0">
+                        <a:buNone/>
+                      </a:pPr>
+                      <a:r>
+                        <a:rPr lang="en-US" sz="1050" dirty="0">
+                          <a:solidFill>
+                            <a:srgbClr val="1B2B3A"/>
+                          </a:solidFill>
+                          <a:latin typeface="Meiryo" pitchFamily="34" charset="0"/>
+                          <a:ea typeface="Meiryo" pitchFamily="34" charset="-122"/>
+                          <a:cs typeface="Meiryo" pitchFamily="34" charset="-120"/>
+                        </a:rPr>
+                        <a:t>ブランチを作ってから送る（main への push は手元で止めている）</a:t>
                       </a:r>
                       <a:endParaRPr lang="en-US" sz="1050" dirty="0">
                         <a:latin typeface="Meiryo" charset="0"/>
@@ -11916,7 +12054,7 @@
                           <a:ea typeface="Meiryo" pitchFamily="34" charset="-122"/>
                           <a:cs typeface="Meiryo" pitchFamily="34" charset="-120"/>
                         </a:rPr>
-                        <a:t>マージのボタンが押せない</a:t>
+                        <a:t>マージしてよいか迷う</a:t>
                       </a:r>
                       <a:endParaRPr lang="en-US" sz="1050" dirty="0">
                         <a:latin typeface="Meiryo" charset="0"/>
@@ -11984,7 +12122,7 @@
                           <a:ea typeface="Meiryo" pitchFamily="34" charset="-122"/>
                           <a:cs typeface="Meiryo" pitchFamily="34" charset="-120"/>
                         </a:rPr>
-                        <a:t>Test が緑か、Approve をもらったか確かめる</a:t>
+                        <a:t>Test が緑で Approve をもらってから（仕組みでは止まらない）</a:t>
                       </a:r>
                       <a:endParaRPr lang="en-US" sz="1050" dirty="0">
                         <a:latin typeface="Meiryo" charset="0"/>
@@ -12324,7 +12462,7 @@
         </p:nvSpPr>
         <p:spPr>
           <a:xfrm>
-            <a:off x="457200" y="4069080"/>
+            <a:off x="457200" y="4434840"/>
             <a:ext cx="8229600" cy="365760"/>
           </a:xfrm>
           <a:prstGeom prst="rect">

--- a/docs/WG立ち上げガイド/03_開発の進め方.pptx
+++ b/docs/WG立ち上げガイド/03_開発の進め方.pptx
@@ -10894,7 +10894,7 @@
                 <a:ea typeface="Meiryo" pitchFamily="34" charset="-122"/>
                 <a:cs typeface="Meiryo" pitchFamily="34" charset="-120"/>
               </a:rPr>
-              <a:t>リポジトリは公開。消しても履歴に残る。.env に置く。</a:t>
+              <a:t>消しても履歴に残り、WG の全員が見られる。.env に置く。</a:t>
             </a:r>
             <a:endParaRPr lang="en-US" sz="1100" dirty="0"/>
           </a:p>
